--- a/docs/AI/装备助手-显微镜AI标记检测.pptx
+++ b/docs/AI/装备助手-显微镜AI标记检测.pptx
@@ -7521,7 +7521,7 @@
                 <a:ea typeface="微软雅黑"/>
                 <a:cs typeface="微软雅黑"/>
               </a:rPr>
-              <a:t>发布者上传安装包与说明，填写适用装备与校验值，经审核后上架。</a:t>
+              <a:t>发布者上传安装包与说明，填写适用装备与校验值后即上架；货架不设权限控制。</a:t>
             </a:r>
           </a:p>
         </p:txBody>
@@ -12215,7 +12215,7 @@
                 <a:ea typeface="微软雅黑"/>
                 <a:cs typeface="微软雅黑"/>
               </a:rPr>
-              <a:t>五阶段 · 五个里程碑 · 三项风险对策</a:t>
+              <a:t>五阶段 · 五个里程碑 · 四项风险对策</a:t>
             </a:r>
           </a:p>
         </p:txBody>
@@ -16358,7 +16358,7 @@
                 <a:ea typeface="微软雅黑"/>
                 <a:cs typeface="微软雅黑"/>
               </a:rPr>
-              <a:t>· 货架权限与追溯</a:t>
+              <a:t>· 版本一致性</a:t>
             </a:r>
           </a:p>
         </p:txBody>
@@ -16399,7 +16399,7 @@
                 <a:ea typeface="微软雅黑"/>
                 <a:cs typeface="微软雅黑"/>
               </a:rPr>
-              <a:t>发布需审核，安装留痕记录版本与校验值。</a:t>
+              <a:t>启动检查货架版本，安装留痕记录版本与校验值，便于核查。</a:t>
             </a:r>
           </a:p>
         </p:txBody>
